--- a/course/技术文档/docker-compose.pptx
+++ b/course/技术文档/docker-compose.pptx
@@ -171,7 +171,7 @@
           <a:p>
             <a:fld id="{5BCAD085-E8A6-8845-BD4E-CB4CCA059FC4}" type="datetimeFigureOut">
               <a:rPr lang="en-US" smtClean="0"/>
-              <a:t>9/2/2026</a:t>
+              <a:t>9/9/2026</a:t>
             </a:fld>
             <a:endParaRPr lang="en-US"/>
           </a:p>
@@ -284,7 +284,7 @@
           <a:p>
             <a:fld id="{5BCAD085-E8A6-8845-BD4E-CB4CCA059FC4}" type="datetimeFigureOut">
               <a:rPr lang="en-US" smtClean="0"/>
-              <a:t>9/2/2026</a:t>
+              <a:t>9/9/2026</a:t>
             </a:fld>
             <a:endParaRPr lang="en-US"/>
           </a:p>
@@ -1189,13 +1189,13 @@
   <p:clrMapOvr>
     <a:masterClrMapping/>
   </p:clrMapOvr>
-  <mc:AlternateContent xmlns:mc="http://schemas.openxmlformats.org/markup-compatibility/2006">
-    <mc:Choice xmlns:p14="http://schemas.microsoft.com/office/powerpoint/2010/main" Requires="p14">
+  <mc:AlternateContent xmlns:mc="http://schemas.openxmlformats.org/markup-compatibility/2006" xmlns:p14="http://schemas.microsoft.com/office/powerpoint/2010/main">
+    <mc:Choice Requires="p14">
       <p:transition p14:dur="400">
         <p:fade/>
       </p:transition>
     </mc:Choice>
-    <mc:Fallback>
+    <mc:Fallback xmlns="">
       <p:transition>
         <p:fade/>
       </p:transition>
@@ -2424,13 +2424,13 @@
   <p:clrMapOvr>
     <a:masterClrMapping/>
   </p:clrMapOvr>
-  <mc:AlternateContent xmlns:mc="http://schemas.openxmlformats.org/markup-compatibility/2006">
-    <mc:Choice xmlns:p14="http://schemas.microsoft.com/office/powerpoint/2010/main" Requires="p14">
+  <mc:AlternateContent xmlns:mc="http://schemas.openxmlformats.org/markup-compatibility/2006" xmlns:p14="http://schemas.microsoft.com/office/powerpoint/2010/main">
+    <mc:Choice Requires="p14">
       <p:transition p14:dur="400">
         <p:fade/>
       </p:transition>
     </mc:Choice>
-    <mc:Fallback>
+    <mc:Fallback xmlns="">
       <p:transition>
         <p:fade/>
       </p:transition>
@@ -3806,13 +3806,13 @@
   <p:clrMapOvr>
     <a:masterClrMapping/>
   </p:clrMapOvr>
-  <mc:AlternateContent xmlns:mc="http://schemas.openxmlformats.org/markup-compatibility/2006">
-    <mc:Choice xmlns:p14="http://schemas.microsoft.com/office/powerpoint/2010/main" Requires="p14">
+  <mc:AlternateContent xmlns:mc="http://schemas.openxmlformats.org/markup-compatibility/2006" xmlns:p14="http://schemas.microsoft.com/office/powerpoint/2010/main">
+    <mc:Choice Requires="p14">
       <p:transition p14:dur="400">
         <p:fade/>
       </p:transition>
     </mc:Choice>
-    <mc:Fallback>
+    <mc:Fallback xmlns="">
       <p:transition>
         <p:fade/>
       </p:transition>
@@ -5073,13 +5073,13 @@
   <p:clrMapOvr>
     <a:masterClrMapping/>
   </p:clrMapOvr>
-  <mc:AlternateContent xmlns:mc="http://schemas.openxmlformats.org/markup-compatibility/2006">
-    <mc:Choice xmlns:p14="http://schemas.microsoft.com/office/powerpoint/2010/main" Requires="p14">
+  <mc:AlternateContent xmlns:mc="http://schemas.openxmlformats.org/markup-compatibility/2006" xmlns:p14="http://schemas.microsoft.com/office/powerpoint/2010/main">
+    <mc:Choice Requires="p14">
       <p:transition p14:dur="400">
         <p:fade/>
       </p:transition>
     </mc:Choice>
-    <mc:Fallback>
+    <mc:Fallback xmlns="">
       <p:transition>
         <p:fade/>
       </p:transition>
@@ -6593,13 +6593,13 @@
   <p:clrMapOvr>
     <a:masterClrMapping/>
   </p:clrMapOvr>
-  <mc:AlternateContent xmlns:mc="http://schemas.openxmlformats.org/markup-compatibility/2006">
-    <mc:Choice xmlns:p14="http://schemas.microsoft.com/office/powerpoint/2010/main" Requires="p14">
+  <mc:AlternateContent xmlns:mc="http://schemas.openxmlformats.org/markup-compatibility/2006" xmlns:p14="http://schemas.microsoft.com/office/powerpoint/2010/main">
+    <mc:Choice Requires="p14">
       <p:transition p14:dur="400">
         <p:fade/>
       </p:transition>
     </mc:Choice>
-    <mc:Fallback>
+    <mc:Fallback xmlns="">
       <p:transition>
         <p:fade/>
       </p:transition>
@@ -8080,13 +8080,13 @@
   <p:clrMapOvr>
     <a:masterClrMapping/>
   </p:clrMapOvr>
-  <mc:AlternateContent xmlns:mc="http://schemas.openxmlformats.org/markup-compatibility/2006">
-    <mc:Choice xmlns:p14="http://schemas.microsoft.com/office/powerpoint/2010/main" Requires="p14">
+  <mc:AlternateContent xmlns:mc="http://schemas.openxmlformats.org/markup-compatibility/2006" xmlns:p14="http://schemas.microsoft.com/office/powerpoint/2010/main">
+    <mc:Choice Requires="p14">
       <p:transition p14:dur="400">
         <p:fade/>
       </p:transition>
     </mc:Choice>
-    <mc:Fallback>
+    <mc:Fallback xmlns="">
       <p:transition>
         <p:fade/>
       </p:transition>
@@ -9452,13 +9452,13 @@
   <p:clrMapOvr>
     <a:masterClrMapping/>
   </p:clrMapOvr>
-  <mc:AlternateContent xmlns:mc="http://schemas.openxmlformats.org/markup-compatibility/2006">
-    <mc:Choice xmlns:p14="http://schemas.microsoft.com/office/powerpoint/2010/main" Requires="p14">
+  <mc:AlternateContent xmlns:mc="http://schemas.openxmlformats.org/markup-compatibility/2006" xmlns:p14="http://schemas.microsoft.com/office/powerpoint/2010/main">
+    <mc:Choice Requires="p14">
       <p:transition p14:dur="400">
         <p:fade/>
       </p:transition>
     </mc:Choice>
-    <mc:Fallback>
+    <mc:Fallback xmlns="">
       <p:transition>
         <p:fade/>
       </p:transition>
@@ -10946,13 +10946,13 @@
   <p:clrMapOvr>
     <a:masterClrMapping/>
   </p:clrMapOvr>
-  <mc:AlternateContent xmlns:mc="http://schemas.openxmlformats.org/markup-compatibility/2006">
-    <mc:Choice xmlns:p14="http://schemas.microsoft.com/office/powerpoint/2010/main" Requires="p14">
+  <mc:AlternateContent xmlns:mc="http://schemas.openxmlformats.org/markup-compatibility/2006" xmlns:p14="http://schemas.microsoft.com/office/powerpoint/2010/main">
+    <mc:Choice Requires="p14">
       <p:transition p14:dur="400">
         <p:fade/>
       </p:transition>
     </mc:Choice>
-    <mc:Fallback>
+    <mc:Fallback xmlns="">
       <p:transition>
         <p:fade/>
       </p:transition>
@@ -12001,13 +12001,13 @@
   <p:clrMapOvr>
     <a:masterClrMapping/>
   </p:clrMapOvr>
-  <mc:AlternateContent xmlns:mc="http://schemas.openxmlformats.org/markup-compatibility/2006">
-    <mc:Choice xmlns:p14="http://schemas.microsoft.com/office/powerpoint/2010/main" Requires="p14">
+  <mc:AlternateContent xmlns:mc="http://schemas.openxmlformats.org/markup-compatibility/2006" xmlns:p14="http://schemas.microsoft.com/office/powerpoint/2010/main">
+    <mc:Choice Requires="p14">
       <p:transition p14:dur="400">
         <p:fade/>
       </p:transition>
     </mc:Choice>
-    <mc:Fallback>
+    <mc:Fallback xmlns="">
       <p:transition>
         <p:fade/>
       </p:transition>
@@ -13676,13 +13676,13 @@
   <p:clrMapOvr>
     <a:masterClrMapping/>
   </p:clrMapOvr>
-  <mc:AlternateContent xmlns:mc="http://schemas.openxmlformats.org/markup-compatibility/2006">
-    <mc:Choice xmlns:p14="http://schemas.microsoft.com/office/powerpoint/2010/main" Requires="p14">
+  <mc:AlternateContent xmlns:mc="http://schemas.openxmlformats.org/markup-compatibility/2006" xmlns:p14="http://schemas.microsoft.com/office/powerpoint/2010/main">
+    <mc:Choice Requires="p14">
       <p:transition p14:dur="400">
         <p:fade/>
       </p:transition>
     </mc:Choice>
-    <mc:Fallback>
+    <mc:Fallback xmlns="">
       <p:transition>
         <p:fade/>
       </p:transition>
@@ -15197,13 +15197,13 @@
   <p:clrMapOvr>
     <a:masterClrMapping/>
   </p:clrMapOvr>
-  <mc:AlternateContent xmlns:mc="http://schemas.openxmlformats.org/markup-compatibility/2006">
-    <mc:Choice xmlns:p14="http://schemas.microsoft.com/office/powerpoint/2010/main" Requires="p14">
+  <mc:AlternateContent xmlns:mc="http://schemas.openxmlformats.org/markup-compatibility/2006" xmlns:p14="http://schemas.microsoft.com/office/powerpoint/2010/main">
+    <mc:Choice Requires="p14">
       <p:transition p14:dur="400">
         <p:fade/>
       </p:transition>
     </mc:Choice>
-    <mc:Fallback>
+    <mc:Fallback xmlns="">
       <p:transition>
         <p:fade/>
       </p:transition>
@@ -16649,13 +16649,13 @@
   <p:clrMapOvr>
     <a:masterClrMapping/>
   </p:clrMapOvr>
-  <mc:AlternateContent xmlns:mc="http://schemas.openxmlformats.org/markup-compatibility/2006">
-    <mc:Choice xmlns:p14="http://schemas.microsoft.com/office/powerpoint/2010/main" Requires="p14">
+  <mc:AlternateContent xmlns:mc="http://schemas.openxmlformats.org/markup-compatibility/2006" xmlns:p14="http://schemas.microsoft.com/office/powerpoint/2010/main">
+    <mc:Choice Requires="p14">
       <p:transition p14:dur="400">
         <p:fade/>
       </p:transition>
     </mc:Choice>
-    <mc:Fallback>
+    <mc:Fallback xmlns="">
       <p:transition>
         <p:fade/>
       </p:transition>
@@ -17203,7 +17203,7 @@
           <p:spPr>
             <a:xfrm>
               <a:off x="4642104" y="2804160"/>
-              <a:ext cx="2090052" cy="234696"/>
+              <a:ext cx="2803653" cy="184666"/>
             </a:xfrm>
             <a:prstGeom prst="rect">
               <a:avLst/>
@@ -17229,7 +17229,29 @@
                   <a:ea typeface="Consolas"/>
                   <a:cs typeface="Consolas"/>
                 </a:rPr>
-                <a:t>docker exec -it &lt;id&gt; bash</a:t>
+                <a:t>docker exec –it –</a:t>
+              </a:r>
+              <a:r>
+                <a:rPr lang="en-US" altLang="zh-CN" sz="1200" b="1" dirty="0">
+                  <a:solidFill>
+                    <a:srgbClr val="2496ED"/>
+                  </a:solidFill>
+                  <a:latin typeface="Consolas"/>
+                  <a:ea typeface="Consolas"/>
+                  <a:cs typeface="Consolas"/>
+                </a:rPr>
+                <a:t>u root</a:t>
+              </a:r>
+              <a:r>
+                <a:rPr lang="en-US" sz="1200" b="1" dirty="0">
+                  <a:solidFill>
+                    <a:srgbClr val="2496ED"/>
+                  </a:solidFill>
+                  <a:latin typeface="Consolas"/>
+                  <a:ea typeface="Consolas"/>
+                  <a:cs typeface="Consolas"/>
+                </a:rPr>
+                <a:t> &lt;id&gt; bash</a:t>
               </a:r>
             </a:p>
           </p:txBody>
@@ -18123,13 +18145,13 @@
   <p:clrMapOvr>
     <a:masterClrMapping/>
   </p:clrMapOvr>
-  <mc:AlternateContent xmlns:mc="http://schemas.openxmlformats.org/markup-compatibility/2006">
-    <mc:Choice xmlns:p14="http://schemas.microsoft.com/office/powerpoint/2010/main" Requires="p14">
+  <mc:AlternateContent xmlns:mc="http://schemas.openxmlformats.org/markup-compatibility/2006" xmlns:p14="http://schemas.microsoft.com/office/powerpoint/2010/main">
+    <mc:Choice Requires="p14">
       <p:transition p14:dur="400">
         <p:fade/>
       </p:transition>
     </mc:Choice>
-    <mc:Fallback>
+    <mc:Fallback xmlns="">
       <p:transition>
         <p:fade/>
       </p:transition>
@@ -19505,13 +19527,13 @@
   <p:clrMapOvr>
     <a:masterClrMapping/>
   </p:clrMapOvr>
-  <mc:AlternateContent xmlns:mc="http://schemas.openxmlformats.org/markup-compatibility/2006">
-    <mc:Choice xmlns:p14="http://schemas.microsoft.com/office/powerpoint/2010/main" Requires="p14">
+  <mc:AlternateContent xmlns:mc="http://schemas.openxmlformats.org/markup-compatibility/2006" xmlns:p14="http://schemas.microsoft.com/office/powerpoint/2010/main">
+    <mc:Choice Requires="p14">
       <p:transition p14:dur="400">
         <p:fade/>
       </p:transition>
     </mc:Choice>
-    <mc:Fallback>
+    <mc:Fallback xmlns="">
       <p:transition>
         <p:fade/>
       </p:transition>
@@ -20964,13 +20986,13 @@
   <p:clrMapOvr>
     <a:masterClrMapping/>
   </p:clrMapOvr>
-  <mc:AlternateContent xmlns:mc="http://schemas.openxmlformats.org/markup-compatibility/2006">
-    <mc:Choice xmlns:p14="http://schemas.microsoft.com/office/powerpoint/2010/main" Requires="p14">
+  <mc:AlternateContent xmlns:mc="http://schemas.openxmlformats.org/markup-compatibility/2006" xmlns:p14="http://schemas.microsoft.com/office/powerpoint/2010/main">
+    <mc:Choice Requires="p14">
       <p:transition p14:dur="400">
         <p:fade/>
       </p:transition>
     </mc:Choice>
-    <mc:Fallback>
+    <mc:Fallback xmlns="">
       <p:transition>
         <p:fade/>
       </p:transition>
